--- a/project2_presentation.pptx
+++ b/project2_presentation.pptx
@@ -5,7 +5,7 @@
     <p:sldMasterId id="2147483648" r:id="rId1"/>
   </p:sldMasterIdLst>
   <p:notesMasterIdLst>
-    <p:notesMasterId r:id="rId16"/>
+    <p:notesMasterId r:id="rId17"/>
   </p:notesMasterIdLst>
   <p:sldIdLst>
     <p:sldId id="256" r:id="rId2"/>
@@ -22,6 +22,7 @@
     <p:sldId id="265" r:id="rId13"/>
     <p:sldId id="266" r:id="rId14"/>
     <p:sldId id="267" r:id="rId15"/>
+    <p:sldId id="271" r:id="rId16"/>
   </p:sldIdLst>
   <p:sldSz cx="9144000" cy="5143500" type="screen16x9"/>
   <p:notesSz cx="5143500" cy="9144000"/>
@@ -667,6 +668,93 @@
             <a:fld id="{F7021451-1387-4CA6-816F-3879F97B5CBC}" type="slidenum">
               <a:rPr lang="en-US"/>
               <a:t>14</a:t>
+            </a:fld>
+            <a:endParaRPr lang="en-US"/>
+          </a:p>
+        </p:txBody>
+      </p:sp>
+    </p:spTree>
+    <p:extLst>
+      <p:ext uri="{BB962C8B-B14F-4D97-AF65-F5344CB8AC3E}">
+        <p14:creationId xmlns:p14="http://schemas.microsoft.com/office/powerpoint/2010/main" val="1024086991"/>
+      </p:ext>
+    </p:extLst>
+  </p:cSld>
+  <p:clrMapOvr>
+    <a:masterClrMapping/>
+  </p:clrMapOvr>
+</p:notes>
+</file>
+
+<file path=ppt/notesSlides/notesSlide14.xml><?xml version="1.0" encoding="utf-8"?>
+<p:notes xmlns:a="http://schemas.openxmlformats.org/drawingml/2006/main" xmlns:r="http://schemas.openxmlformats.org/officeDocument/2006/relationships" xmlns:p="http://schemas.openxmlformats.org/presentationml/2006/main">
+  <p:cSld>
+    <p:spTree>
+      <p:nvGrpSpPr>
+        <p:cNvPr id="1" name=""/>
+        <p:cNvGrpSpPr/>
+        <p:nvPr/>
+      </p:nvGrpSpPr>
+      <p:grpSpPr>
+        <a:xfrm>
+          <a:off x="0" y="0"/>
+          <a:ext cx="0" cy="0"/>
+          <a:chOff x="0" y="0"/>
+          <a:chExt cx="0" cy="0"/>
+        </a:xfrm>
+      </p:grpSpPr>
+      <p:sp>
+        <p:nvSpPr>
+          <p:cNvPr id="2" name="Slide Image Placeholder 1"/>
+          <p:cNvSpPr>
+            <a:spLocks noGrp="1" noRot="1" noChangeAspect="1"/>
+          </p:cNvSpPr>
+          <p:nvPr>
+            <p:ph type="sldImg"/>
+          </p:nvPr>
+        </p:nvSpPr>
+        <p:spPr/>
+      </p:sp>
+      <p:sp>
+        <p:nvSpPr>
+          <p:cNvPr id="3" name="Notes Placeholder 2"/>
+          <p:cNvSpPr>
+            <a:spLocks noGrp="1"/>
+          </p:cNvSpPr>
+          <p:nvPr>
+            <p:ph type="body" idx="1"/>
+          </p:nvPr>
+        </p:nvSpPr>
+        <p:spPr/>
+        <p:txBody>
+          <a:bodyPr/>
+          <a:lstStyle/>
+          <a:p>
+            <a:r>
+              <a:rPr lang="en-US" dirty="0"/>
+              <a:t>Use this slide to close the presentation. Shows the professor you understand the limitations of the current system and know how to extend it. Key points: TLS for security, second nginx for true HA, Kubernetes for production scalability, PBFT for Byzantine tolerance.</a:t>
+            </a:r>
+          </a:p>
+        </p:txBody>
+      </p:sp>
+      <p:sp>
+        <p:nvSpPr>
+          <p:cNvPr id="4" name="Slide Number Placeholder 3"/>
+          <p:cNvSpPr>
+            <a:spLocks noGrp="1"/>
+          </p:cNvSpPr>
+          <p:nvPr>
+            <p:ph type="sldNum" sz="quarter" idx="10"/>
+          </p:nvPr>
+        </p:nvSpPr>
+        <p:spPr/>
+        <p:txBody>
+          <a:bodyPr/>
+          <a:lstStyle/>
+          <a:p>
+            <a:fld id="{F7021451-1387-4CA6-816F-3879F97B5CBC}" type="slidenum">
+              <a:rPr lang="en-US"/>
+              <a:t>15</a:t>
             </a:fld>
             <a:endParaRPr lang="en-US"/>
           </a:p>
@@ -9045,6 +9133,2007 @@
               <a:t>https://github.com/shakibafotouhi01/Cloud-Computing-Project</a:t>
             </a:r>
             <a:endParaRPr lang="en-US" sz="1000" dirty="0"/>
+          </a:p>
+        </p:txBody>
+      </p:sp>
+    </p:spTree>
+  </p:cSld>
+  <p:clrMapOvr>
+    <a:masterClrMapping/>
+  </p:clrMapOvr>
+</p:sld>
+</file>
+
+<file path=ppt/slides/slide15.xml><?xml version="1.0" encoding="utf-8"?>
+<p:sld xmlns:a="http://schemas.openxmlformats.org/drawingml/2006/main" xmlns:r="http://schemas.openxmlformats.org/officeDocument/2006/relationships" xmlns:p="http://schemas.openxmlformats.org/presentationml/2006/main">
+  <p:cSld>
+    <p:spTree>
+      <p:nvGrpSpPr>
+        <p:cNvPr id="1" name=""/>
+        <p:cNvGrpSpPr/>
+        <p:nvPr/>
+      </p:nvGrpSpPr>
+      <p:grpSpPr>
+        <a:xfrm>
+          <a:off x="0" y="0"/>
+          <a:ext cx="0" cy="0"/>
+          <a:chOff x="0" y="0"/>
+          <a:chExt cx="0" cy="0"/>
+        </a:xfrm>
+      </p:grpSpPr>
+      <p:sp>
+        <p:nvSpPr>
+          <p:cNvPr id="2" name="Shape 0"/>
+          <p:cNvSpPr/>
+          <p:nvPr/>
+        </p:nvSpPr>
+        <p:spPr>
+          <a:xfrm>
+            <a:off x="457200" y="256032"/>
+            <a:ext cx="2011680" cy="256032"/>
+          </a:xfrm>
+          <a:prstGeom prst="roundRect">
+            <a:avLst>
+              <a:gd name="adj" fmla="val 14286"/>
+            </a:avLst>
+          </a:prstGeom>
+          <a:solidFill>
+            <a:srgbClr val="028090"/>
+          </a:solidFill>
+          <a:ln w="12700">
+            <a:solidFill>
+              <a:srgbClr val="028090"/>
+            </a:solidFill>
+            <a:prstDash val="solid"/>
+          </a:ln>
+        </p:spPr>
+        <p:txBody>
+          <a:bodyPr/>
+          <a:lstStyle/>
+          <a:p>
+            <a:endParaRPr lang="en-US"/>
+          </a:p>
+        </p:txBody>
+      </p:sp>
+      <p:sp>
+        <p:nvSpPr>
+          <p:cNvPr id="3" name="Text 1"/>
+          <p:cNvSpPr/>
+          <p:nvPr/>
+        </p:nvSpPr>
+        <p:spPr>
+          <a:xfrm>
+            <a:off x="457200" y="256032"/>
+            <a:ext cx="2011680" cy="256032"/>
+          </a:xfrm>
+          <a:prstGeom prst="rect">
+            <a:avLst/>
+          </a:prstGeom>
+          <a:noFill/>
+          <a:ln/>
+        </p:spPr>
+        <p:txBody>
+          <a:bodyPr wrap="square" lIns="0" tIns="0" rIns="0" bIns="0" rtlCol="0" anchor="ctr"/>
+          <a:lstStyle/>
+          <a:p>
+            <a:pPr marL="0" indent="0" algn="ctr">
+              <a:buNone/>
+            </a:pPr>
+            <a:r>
+              <a:rPr lang="en-US" sz="900" b="1" dirty="0">
+                <a:solidFill>
+                  <a:srgbClr val="FFFFFF"/>
+                </a:solidFill>
+              </a:rPr>
+              <a:t>FUTURE IMPROVEMENTS</a:t>
+            </a:r>
+            <a:endParaRPr lang="en-US" sz="900" dirty="0"/>
+          </a:p>
+        </p:txBody>
+      </p:sp>
+      <p:sp>
+        <p:nvSpPr>
+          <p:cNvPr id="4" name="Text 2"/>
+          <p:cNvSpPr/>
+          <p:nvPr/>
+        </p:nvSpPr>
+        <p:spPr>
+          <a:xfrm>
+            <a:off x="457200" y="566928"/>
+            <a:ext cx="8229600" cy="548640"/>
+          </a:xfrm>
+          <a:prstGeom prst="rect">
+            <a:avLst/>
+          </a:prstGeom>
+          <a:noFill/>
+          <a:ln/>
+        </p:spPr>
+        <p:txBody>
+          <a:bodyPr wrap="square" lIns="0" tIns="0" rIns="0" bIns="0" rtlCol="0" anchor="ctr"/>
+          <a:lstStyle/>
+          <a:p>
+            <a:pPr marL="0" indent="0" algn="l">
+              <a:buNone/>
+            </a:pPr>
+            <a:r>
+              <a:rPr lang="en-US" sz="2800" b="1" dirty="0">
+                <a:solidFill>
+                  <a:srgbClr val="0D1B2A"/>
+                </a:solidFill>
+                <a:latin typeface="Cambria" pitchFamily="34" charset="0"/>
+                <a:ea typeface="Cambria" pitchFamily="34" charset="-122"/>
+                <a:cs typeface="Cambria" pitchFamily="34" charset="-120"/>
+              </a:rPr>
+              <a:t>What Could Be Added Next</a:t>
+            </a:r>
+            <a:endParaRPr lang="en-US" sz="2800" dirty="0"/>
+          </a:p>
+        </p:txBody>
+      </p:sp>
+      <p:sp>
+        <p:nvSpPr>
+          <p:cNvPr id="5" name="Shape 3"/>
+          <p:cNvSpPr/>
+          <p:nvPr/>
+        </p:nvSpPr>
+        <p:spPr>
+          <a:xfrm>
+            <a:off x="457200" y="1261872"/>
+            <a:ext cx="3977640" cy="1042416"/>
+          </a:xfrm>
+          <a:prstGeom prst="roundRect">
+            <a:avLst>
+              <a:gd name="adj" fmla="val 8772"/>
+            </a:avLst>
+          </a:prstGeom>
+          <a:solidFill>
+            <a:srgbClr val="FFFFFF"/>
+          </a:solidFill>
+          <a:ln w="6350">
+            <a:solidFill>
+              <a:srgbClr val="E2E8F0"/>
+            </a:solidFill>
+            <a:prstDash val="solid"/>
+          </a:ln>
+          <a:effectLst>
+            <a:outerShdw blurRad="76200" dist="12700" dir="2700000" algn="bl" rotWithShape="0">
+              <a:srgbClr val="000000">
+                <a:alpha val="8000"/>
+              </a:srgbClr>
+            </a:outerShdw>
+          </a:effectLst>
+        </p:spPr>
+        <p:txBody>
+          <a:bodyPr/>
+          <a:lstStyle/>
+          <a:p>
+            <a:endParaRPr lang="en-US"/>
+          </a:p>
+        </p:txBody>
+      </p:sp>
+      <p:sp>
+        <p:nvSpPr>
+          <p:cNvPr id="6" name="Shape 4"/>
+          <p:cNvSpPr/>
+          <p:nvPr/>
+        </p:nvSpPr>
+        <p:spPr>
+          <a:xfrm>
+            <a:off x="457200" y="1371600"/>
+            <a:ext cx="54864" cy="822960"/>
+          </a:xfrm>
+          <a:prstGeom prst="rect">
+            <a:avLst/>
+          </a:prstGeom>
+          <a:solidFill>
+            <a:srgbClr val="DC2626"/>
+          </a:solidFill>
+          <a:ln w="12700">
+            <a:solidFill>
+              <a:srgbClr val="DC2626"/>
+            </a:solidFill>
+            <a:prstDash val="solid"/>
+          </a:ln>
+        </p:spPr>
+        <p:txBody>
+          <a:bodyPr/>
+          <a:lstStyle/>
+          <a:p>
+            <a:endParaRPr lang="en-US"/>
+          </a:p>
+        </p:txBody>
+      </p:sp>
+      <p:sp>
+        <p:nvSpPr>
+          <p:cNvPr id="7" name="Text 5"/>
+          <p:cNvSpPr/>
+          <p:nvPr/>
+        </p:nvSpPr>
+        <p:spPr>
+          <a:xfrm>
+            <a:off x="585216" y="1353312"/>
+            <a:ext cx="457200" cy="457200"/>
+          </a:xfrm>
+          <a:prstGeom prst="rect">
+            <a:avLst/>
+          </a:prstGeom>
+          <a:noFill/>
+          <a:ln/>
+        </p:spPr>
+        <p:txBody>
+          <a:bodyPr wrap="square" lIns="0" tIns="0" rIns="0" bIns="0" rtlCol="0" anchor="ctr"/>
+          <a:lstStyle/>
+          <a:p>
+            <a:pPr marL="0" indent="0" algn="ctr">
+              <a:buNone/>
+            </a:pPr>
+            <a:r>
+              <a:rPr lang="en-US" sz="2000" dirty="0">
+                <a:solidFill>
+                  <a:srgbClr val="000000"/>
+                </a:solidFill>
+              </a:rPr>
+              <a:t>🔒</a:t>
+            </a:r>
+            <a:endParaRPr lang="en-US" sz="2000" dirty="0"/>
+          </a:p>
+        </p:txBody>
+      </p:sp>
+      <p:sp>
+        <p:nvSpPr>
+          <p:cNvPr id="8" name="Shape 6"/>
+          <p:cNvSpPr/>
+          <p:nvPr/>
+        </p:nvSpPr>
+        <p:spPr>
+          <a:xfrm>
+            <a:off x="1115568" y="1335024"/>
+            <a:ext cx="1280160" cy="219456"/>
+          </a:xfrm>
+          <a:prstGeom prst="roundRect">
+            <a:avLst>
+              <a:gd name="adj" fmla="val 16667"/>
+            </a:avLst>
+          </a:prstGeom>
+          <a:solidFill>
+            <a:srgbClr val="FEF2F2"/>
+          </a:solidFill>
+          <a:ln w="6350">
+            <a:solidFill>
+              <a:srgbClr val="DC2626"/>
+            </a:solidFill>
+            <a:prstDash val="solid"/>
+          </a:ln>
+        </p:spPr>
+        <p:txBody>
+          <a:bodyPr/>
+          <a:lstStyle/>
+          <a:p>
+            <a:endParaRPr lang="en-US"/>
+          </a:p>
+        </p:txBody>
+      </p:sp>
+      <p:sp>
+        <p:nvSpPr>
+          <p:cNvPr id="9" name="Text 7"/>
+          <p:cNvSpPr/>
+          <p:nvPr/>
+        </p:nvSpPr>
+        <p:spPr>
+          <a:xfrm>
+            <a:off x="1115568" y="1335024"/>
+            <a:ext cx="1280160" cy="219456"/>
+          </a:xfrm>
+          <a:prstGeom prst="rect">
+            <a:avLst/>
+          </a:prstGeom>
+          <a:noFill/>
+          <a:ln/>
+        </p:spPr>
+        <p:txBody>
+          <a:bodyPr wrap="square" lIns="0" tIns="0" rIns="0" bIns="0" rtlCol="0" anchor="ctr"/>
+          <a:lstStyle/>
+          <a:p>
+            <a:pPr marL="0" indent="0" algn="ctr">
+              <a:buNone/>
+            </a:pPr>
+            <a:r>
+              <a:rPr lang="en-US" sz="800" b="1" dirty="0">
+                <a:solidFill>
+                  <a:srgbClr val="DC2626"/>
+                </a:solidFill>
+                <a:latin typeface="Calibri" pitchFamily="34" charset="0"/>
+                <a:ea typeface="Calibri" pitchFamily="34" charset="-122"/>
+                <a:cs typeface="Calibri" pitchFamily="34" charset="-120"/>
+              </a:rPr>
+              <a:t>Security</a:t>
+            </a:r>
+            <a:endParaRPr lang="en-US" sz="800" dirty="0"/>
+          </a:p>
+        </p:txBody>
+      </p:sp>
+      <p:sp>
+        <p:nvSpPr>
+          <p:cNvPr id="10" name="Text 8"/>
+          <p:cNvSpPr/>
+          <p:nvPr/>
+        </p:nvSpPr>
+        <p:spPr>
+          <a:xfrm>
+            <a:off x="2487168" y="1316736"/>
+            <a:ext cx="1828800" cy="256032"/>
+          </a:xfrm>
+          <a:prstGeom prst="rect">
+            <a:avLst/>
+          </a:prstGeom>
+          <a:noFill/>
+          <a:ln/>
+        </p:spPr>
+        <p:txBody>
+          <a:bodyPr wrap="square" lIns="0" tIns="0" rIns="0" bIns="0" rtlCol="0" anchor="ctr"/>
+          <a:lstStyle/>
+          <a:p>
+            <a:pPr marL="0" indent="0">
+              <a:buNone/>
+            </a:pPr>
+            <a:r>
+              <a:rPr lang="en-US" sz="1200" b="1" dirty="0">
+                <a:solidFill>
+                  <a:srgbClr val="0D1B2A"/>
+                </a:solidFill>
+                <a:latin typeface="Calibri" pitchFamily="34" charset="0"/>
+                <a:ea typeface="Calibri" pitchFamily="34" charset="-122"/>
+                <a:cs typeface="Calibri" pitchFamily="34" charset="-120"/>
+              </a:rPr>
+              <a:t>TLS Encryption</a:t>
+            </a:r>
+            <a:endParaRPr lang="en-US" sz="1200" dirty="0"/>
+          </a:p>
+        </p:txBody>
+      </p:sp>
+      <p:sp>
+        <p:nvSpPr>
+          <p:cNvPr id="11" name="Text 9"/>
+          <p:cNvSpPr/>
+          <p:nvPr/>
+        </p:nvSpPr>
+        <p:spPr>
+          <a:xfrm>
+            <a:off x="1115568" y="1609344"/>
+            <a:ext cx="3200400" cy="365760"/>
+          </a:xfrm>
+          <a:prstGeom prst="rect">
+            <a:avLst/>
+          </a:prstGeom>
+          <a:noFill/>
+          <a:ln/>
+        </p:spPr>
+        <p:txBody>
+          <a:bodyPr wrap="square" lIns="0" tIns="0" rIns="0" bIns="0" rtlCol="0" anchor="ctr"/>
+          <a:lstStyle/>
+          <a:p>
+            <a:pPr marL="0" indent="0">
+              <a:buNone/>
+            </a:pPr>
+            <a:r>
+              <a:rPr lang="en-US" sz="900" dirty="0">
+                <a:solidFill>
+                  <a:srgbClr val="334155"/>
+                </a:solidFill>
+                <a:latin typeface="Calibri" pitchFamily="34" charset="0"/>
+                <a:ea typeface="Calibri" pitchFamily="34" charset="-122"/>
+                <a:cs typeface="Calibri" pitchFamily="34" charset="-120"/>
+              </a:rPr>
+              <a:t>Add HTTPS on nginx endpoint — encrypt data in transit between all services and clients.</a:t>
+            </a:r>
+            <a:endParaRPr lang="en-US" sz="900" dirty="0"/>
+          </a:p>
+        </p:txBody>
+      </p:sp>
+      <p:sp>
+        <p:nvSpPr>
+          <p:cNvPr id="12" name="Text 10"/>
+          <p:cNvSpPr/>
+          <p:nvPr/>
+        </p:nvSpPr>
+        <p:spPr>
+          <a:xfrm>
+            <a:off x="1115568" y="2011680"/>
+            <a:ext cx="3200400" cy="201168"/>
+          </a:xfrm>
+          <a:prstGeom prst="rect">
+            <a:avLst/>
+          </a:prstGeom>
+          <a:noFill/>
+          <a:ln/>
+        </p:spPr>
+        <p:txBody>
+          <a:bodyPr wrap="square" lIns="0" tIns="0" rIns="0" bIns="0" rtlCol="0" anchor="ctr"/>
+          <a:lstStyle/>
+          <a:p>
+            <a:pPr marL="0" indent="0">
+              <a:buNone/>
+            </a:pPr>
+            <a:r>
+              <a:rPr lang="en-US" sz="800" dirty="0">
+                <a:solidFill>
+                  <a:srgbClr val="DC2626"/>
+                </a:solidFill>
+                <a:latin typeface="Courier New" pitchFamily="34" charset="0"/>
+                <a:ea typeface="Courier New" pitchFamily="34" charset="-122"/>
+                <a:cs typeface="Courier New" pitchFamily="34" charset="-120"/>
+              </a:rPr>
+              <a:t>→  nginx ssl_certificate + secure=True in MinIO SDK</a:t>
+            </a:r>
+            <a:endParaRPr lang="en-US" sz="800" dirty="0"/>
+          </a:p>
+        </p:txBody>
+      </p:sp>
+      <p:sp>
+        <p:nvSpPr>
+          <p:cNvPr id="13" name="Shape 11"/>
+          <p:cNvSpPr/>
+          <p:nvPr/>
+        </p:nvSpPr>
+        <p:spPr>
+          <a:xfrm>
+            <a:off x="4617720" y="1261872"/>
+            <a:ext cx="3977640" cy="1042416"/>
+          </a:xfrm>
+          <a:prstGeom prst="roundRect">
+            <a:avLst>
+              <a:gd name="adj" fmla="val 8772"/>
+            </a:avLst>
+          </a:prstGeom>
+          <a:solidFill>
+            <a:srgbClr val="FFFFFF"/>
+          </a:solidFill>
+          <a:ln w="6350">
+            <a:solidFill>
+              <a:srgbClr val="E2E8F0"/>
+            </a:solidFill>
+            <a:prstDash val="solid"/>
+          </a:ln>
+          <a:effectLst>
+            <a:outerShdw blurRad="76200" dist="12700" dir="2700000" algn="bl" rotWithShape="0">
+              <a:srgbClr val="000000">
+                <a:alpha val="8000"/>
+              </a:srgbClr>
+            </a:outerShdw>
+          </a:effectLst>
+        </p:spPr>
+        <p:txBody>
+          <a:bodyPr/>
+          <a:lstStyle/>
+          <a:p>
+            <a:endParaRPr lang="en-US"/>
+          </a:p>
+        </p:txBody>
+      </p:sp>
+      <p:sp>
+        <p:nvSpPr>
+          <p:cNvPr id="14" name="Shape 12"/>
+          <p:cNvSpPr/>
+          <p:nvPr/>
+        </p:nvSpPr>
+        <p:spPr>
+          <a:xfrm>
+            <a:off x="4617720" y="1371600"/>
+            <a:ext cx="54864" cy="822960"/>
+          </a:xfrm>
+          <a:prstGeom prst="rect">
+            <a:avLst/>
+          </a:prstGeom>
+          <a:solidFill>
+            <a:srgbClr val="1B6CA8"/>
+          </a:solidFill>
+          <a:ln w="12700">
+            <a:solidFill>
+              <a:srgbClr val="1B6CA8"/>
+            </a:solidFill>
+            <a:prstDash val="solid"/>
+          </a:ln>
+        </p:spPr>
+        <p:txBody>
+          <a:bodyPr/>
+          <a:lstStyle/>
+          <a:p>
+            <a:endParaRPr lang="en-US"/>
+          </a:p>
+        </p:txBody>
+      </p:sp>
+      <p:sp>
+        <p:nvSpPr>
+          <p:cNvPr id="15" name="Text 13"/>
+          <p:cNvSpPr/>
+          <p:nvPr/>
+        </p:nvSpPr>
+        <p:spPr>
+          <a:xfrm>
+            <a:off x="4745736" y="1353312"/>
+            <a:ext cx="457200" cy="457200"/>
+          </a:xfrm>
+          <a:prstGeom prst="rect">
+            <a:avLst/>
+          </a:prstGeom>
+          <a:noFill/>
+          <a:ln/>
+        </p:spPr>
+        <p:txBody>
+          <a:bodyPr wrap="square" lIns="0" tIns="0" rIns="0" bIns="0" rtlCol="0" anchor="ctr"/>
+          <a:lstStyle/>
+          <a:p>
+            <a:pPr marL="0" indent="0" algn="ctr">
+              <a:buNone/>
+            </a:pPr>
+            <a:r>
+              <a:rPr lang="en-US" sz="2000" dirty="0">
+                <a:solidFill>
+                  <a:srgbClr val="000000"/>
+                </a:solidFill>
+              </a:rPr>
+              <a:t>⚖️</a:t>
+            </a:r>
+            <a:endParaRPr lang="en-US" sz="2000" dirty="0"/>
+          </a:p>
+        </p:txBody>
+      </p:sp>
+      <p:sp>
+        <p:nvSpPr>
+          <p:cNvPr id="16" name="Shape 14"/>
+          <p:cNvSpPr/>
+          <p:nvPr/>
+        </p:nvSpPr>
+        <p:spPr>
+          <a:xfrm>
+            <a:off x="5276088" y="1335024"/>
+            <a:ext cx="1280160" cy="219456"/>
+          </a:xfrm>
+          <a:prstGeom prst="roundRect">
+            <a:avLst>
+              <a:gd name="adj" fmla="val 16667"/>
+            </a:avLst>
+          </a:prstGeom>
+          <a:solidFill>
+            <a:srgbClr val="EFF6FF"/>
+          </a:solidFill>
+          <a:ln w="6350">
+            <a:solidFill>
+              <a:srgbClr val="1B6CA8"/>
+            </a:solidFill>
+            <a:prstDash val="solid"/>
+          </a:ln>
+        </p:spPr>
+        <p:txBody>
+          <a:bodyPr/>
+          <a:lstStyle/>
+          <a:p>
+            <a:endParaRPr lang="en-US"/>
+          </a:p>
+        </p:txBody>
+      </p:sp>
+      <p:sp>
+        <p:nvSpPr>
+          <p:cNvPr id="17" name="Text 15"/>
+          <p:cNvSpPr/>
+          <p:nvPr/>
+        </p:nvSpPr>
+        <p:spPr>
+          <a:xfrm>
+            <a:off x="5276088" y="1335024"/>
+            <a:ext cx="1280160" cy="219456"/>
+          </a:xfrm>
+          <a:prstGeom prst="rect">
+            <a:avLst/>
+          </a:prstGeom>
+          <a:noFill/>
+          <a:ln/>
+        </p:spPr>
+        <p:txBody>
+          <a:bodyPr wrap="square" lIns="0" tIns="0" rIns="0" bIns="0" rtlCol="0" anchor="ctr"/>
+          <a:lstStyle/>
+          <a:p>
+            <a:pPr marL="0" indent="0" algn="ctr">
+              <a:buNone/>
+            </a:pPr>
+            <a:r>
+              <a:rPr lang="en-US" sz="800" b="1" dirty="0">
+                <a:solidFill>
+                  <a:srgbClr val="1B6CA8"/>
+                </a:solidFill>
+                <a:latin typeface="Calibri" pitchFamily="34" charset="0"/>
+                <a:ea typeface="Calibri" pitchFamily="34" charset="-122"/>
+                <a:cs typeface="Calibri" pitchFamily="34" charset="-120"/>
+              </a:rPr>
+              <a:t>High Availability</a:t>
+            </a:r>
+            <a:endParaRPr lang="en-US" sz="800" dirty="0"/>
+          </a:p>
+        </p:txBody>
+      </p:sp>
+      <p:sp>
+        <p:nvSpPr>
+          <p:cNvPr id="18" name="Text 16"/>
+          <p:cNvSpPr/>
+          <p:nvPr/>
+        </p:nvSpPr>
+        <p:spPr>
+          <a:xfrm>
+            <a:off x="6647688" y="1316736"/>
+            <a:ext cx="1828800" cy="256032"/>
+          </a:xfrm>
+          <a:prstGeom prst="rect">
+            <a:avLst/>
+          </a:prstGeom>
+          <a:noFill/>
+          <a:ln/>
+        </p:spPr>
+        <p:txBody>
+          <a:bodyPr wrap="square" lIns="0" tIns="0" rIns="0" bIns="0" rtlCol="0" anchor="ctr"/>
+          <a:lstStyle/>
+          <a:p>
+            <a:pPr marL="0" indent="0">
+              <a:buNone/>
+            </a:pPr>
+            <a:r>
+              <a:rPr lang="en-US" sz="1200" b="1" dirty="0">
+                <a:solidFill>
+                  <a:srgbClr val="0D1B2A"/>
+                </a:solidFill>
+                <a:latin typeface="Calibri" pitchFamily="34" charset="0"/>
+                <a:ea typeface="Calibri" pitchFamily="34" charset="-122"/>
+                <a:cs typeface="Calibri" pitchFamily="34" charset="-120"/>
+              </a:rPr>
+              <a:t>Second nginx Instance</a:t>
+            </a:r>
+            <a:endParaRPr lang="en-US" sz="1200" dirty="0"/>
+          </a:p>
+        </p:txBody>
+      </p:sp>
+      <p:sp>
+        <p:nvSpPr>
+          <p:cNvPr id="19" name="Text 17"/>
+          <p:cNvSpPr/>
+          <p:nvPr/>
+        </p:nvSpPr>
+        <p:spPr>
+          <a:xfrm>
+            <a:off x="5276088" y="1609344"/>
+            <a:ext cx="3200400" cy="365760"/>
+          </a:xfrm>
+          <a:prstGeom prst="rect">
+            <a:avLst/>
+          </a:prstGeom>
+          <a:noFill/>
+          <a:ln/>
+        </p:spPr>
+        <p:txBody>
+          <a:bodyPr wrap="square" lIns="0" tIns="0" rIns="0" bIns="0" rtlCol="0" anchor="ctr"/>
+          <a:lstStyle/>
+          <a:p>
+            <a:pPr marL="0" indent="0">
+              <a:buNone/>
+            </a:pPr>
+            <a:r>
+              <a:rPr lang="en-US" sz="900" dirty="0">
+                <a:solidFill>
+                  <a:srgbClr val="334155"/>
+                </a:solidFill>
+                <a:latin typeface="Calibri" pitchFamily="34" charset="0"/>
+                <a:ea typeface="Calibri" pitchFamily="34" charset="-122"/>
+                <a:cs typeface="Calibri" pitchFamily="34" charset="-120"/>
+              </a:rPr>
+              <a:t>Eliminate the nginx single point of failure by running a primary + backup with Keepalived and a floating IP.</a:t>
+            </a:r>
+            <a:endParaRPr lang="en-US" sz="900" dirty="0"/>
+          </a:p>
+        </p:txBody>
+      </p:sp>
+      <p:sp>
+        <p:nvSpPr>
+          <p:cNvPr id="20" name="Text 18"/>
+          <p:cNvSpPr/>
+          <p:nvPr/>
+        </p:nvSpPr>
+        <p:spPr>
+          <a:xfrm>
+            <a:off x="5276088" y="2011680"/>
+            <a:ext cx="3200400" cy="201168"/>
+          </a:xfrm>
+          <a:prstGeom prst="rect">
+            <a:avLst/>
+          </a:prstGeom>
+          <a:noFill/>
+          <a:ln/>
+        </p:spPr>
+        <p:txBody>
+          <a:bodyPr wrap="square" lIns="0" tIns="0" rIns="0" bIns="0" rtlCol="0" anchor="ctr"/>
+          <a:lstStyle/>
+          <a:p>
+            <a:pPr marL="0" indent="0">
+              <a:buNone/>
+            </a:pPr>
+            <a:r>
+              <a:rPr lang="en-US" sz="800" dirty="0">
+                <a:solidFill>
+                  <a:srgbClr val="1B6CA8"/>
+                </a:solidFill>
+                <a:latin typeface="Courier New" pitchFamily="34" charset="0"/>
+                <a:ea typeface="Courier New" pitchFamily="34" charset="-122"/>
+                <a:cs typeface="Courier New" pitchFamily="34" charset="-120"/>
+              </a:rPr>
+              <a:t>→  Keepalived heartbeat — failover in &lt; 1 second</a:t>
+            </a:r>
+            <a:endParaRPr lang="en-US" sz="800" dirty="0"/>
+          </a:p>
+        </p:txBody>
+      </p:sp>
+      <p:sp>
+        <p:nvSpPr>
+          <p:cNvPr id="21" name="Shape 19"/>
+          <p:cNvSpPr/>
+          <p:nvPr/>
+        </p:nvSpPr>
+        <p:spPr>
+          <a:xfrm>
+            <a:off x="457200" y="2432304"/>
+            <a:ext cx="3977640" cy="1042416"/>
+          </a:xfrm>
+          <a:prstGeom prst="roundRect">
+            <a:avLst>
+              <a:gd name="adj" fmla="val 8772"/>
+            </a:avLst>
+          </a:prstGeom>
+          <a:solidFill>
+            <a:srgbClr val="FFFFFF"/>
+          </a:solidFill>
+          <a:ln w="6350">
+            <a:solidFill>
+              <a:srgbClr val="E2E8F0"/>
+            </a:solidFill>
+            <a:prstDash val="solid"/>
+          </a:ln>
+          <a:effectLst>
+            <a:outerShdw blurRad="76200" dist="12700" dir="2700000" algn="bl" rotWithShape="0">
+              <a:srgbClr val="000000">
+                <a:alpha val="8000"/>
+              </a:srgbClr>
+            </a:outerShdw>
+          </a:effectLst>
+        </p:spPr>
+        <p:txBody>
+          <a:bodyPr/>
+          <a:lstStyle/>
+          <a:p>
+            <a:endParaRPr lang="en-US"/>
+          </a:p>
+        </p:txBody>
+      </p:sp>
+      <p:sp>
+        <p:nvSpPr>
+          <p:cNvPr id="22" name="Shape 20"/>
+          <p:cNvSpPr/>
+          <p:nvPr/>
+        </p:nvSpPr>
+        <p:spPr>
+          <a:xfrm>
+            <a:off x="457200" y="2542032"/>
+            <a:ext cx="54864" cy="822960"/>
+          </a:xfrm>
+          <a:prstGeom prst="rect">
+            <a:avLst/>
+          </a:prstGeom>
+          <a:solidFill>
+            <a:srgbClr val="7C3AED"/>
+          </a:solidFill>
+          <a:ln w="12700">
+            <a:solidFill>
+              <a:srgbClr val="7C3AED"/>
+            </a:solidFill>
+            <a:prstDash val="solid"/>
+          </a:ln>
+        </p:spPr>
+        <p:txBody>
+          <a:bodyPr/>
+          <a:lstStyle/>
+          <a:p>
+            <a:endParaRPr lang="en-US"/>
+          </a:p>
+        </p:txBody>
+      </p:sp>
+      <p:sp>
+        <p:nvSpPr>
+          <p:cNvPr id="23" name="Text 21"/>
+          <p:cNvSpPr/>
+          <p:nvPr/>
+        </p:nvSpPr>
+        <p:spPr>
+          <a:xfrm>
+            <a:off x="585216" y="2523744"/>
+            <a:ext cx="457200" cy="457200"/>
+          </a:xfrm>
+          <a:prstGeom prst="rect">
+            <a:avLst/>
+          </a:prstGeom>
+          <a:noFill/>
+          <a:ln/>
+        </p:spPr>
+        <p:txBody>
+          <a:bodyPr wrap="square" lIns="0" tIns="0" rIns="0" bIns="0" rtlCol="0" anchor="ctr"/>
+          <a:lstStyle/>
+          <a:p>
+            <a:pPr marL="0" indent="0" algn="ctr">
+              <a:buNone/>
+            </a:pPr>
+            <a:r>
+              <a:rPr lang="en-US" sz="2000" dirty="0">
+                <a:solidFill>
+                  <a:srgbClr val="000000"/>
+                </a:solidFill>
+              </a:rPr>
+              <a:t>🗂️</a:t>
+            </a:r>
+            <a:endParaRPr lang="en-US" sz="2000" dirty="0"/>
+          </a:p>
+        </p:txBody>
+      </p:sp>
+      <p:sp>
+        <p:nvSpPr>
+          <p:cNvPr id="24" name="Shape 22"/>
+          <p:cNvSpPr/>
+          <p:nvPr/>
+        </p:nvSpPr>
+        <p:spPr>
+          <a:xfrm>
+            <a:off x="1115568" y="2505456"/>
+            <a:ext cx="1280160" cy="219456"/>
+          </a:xfrm>
+          <a:prstGeom prst="roundRect">
+            <a:avLst>
+              <a:gd name="adj" fmla="val 16667"/>
+            </a:avLst>
+          </a:prstGeom>
+          <a:solidFill>
+            <a:srgbClr val="F5F3FF"/>
+          </a:solidFill>
+          <a:ln w="6350">
+            <a:solidFill>
+              <a:srgbClr val="7C3AED"/>
+            </a:solidFill>
+            <a:prstDash val="solid"/>
+          </a:ln>
+        </p:spPr>
+        <p:txBody>
+          <a:bodyPr/>
+          <a:lstStyle/>
+          <a:p>
+            <a:endParaRPr lang="en-US"/>
+          </a:p>
+        </p:txBody>
+      </p:sp>
+      <p:sp>
+        <p:nvSpPr>
+          <p:cNvPr id="25" name="Text 23"/>
+          <p:cNvSpPr/>
+          <p:nvPr/>
+        </p:nvSpPr>
+        <p:spPr>
+          <a:xfrm>
+            <a:off x="1115568" y="2505456"/>
+            <a:ext cx="1280160" cy="219456"/>
+          </a:xfrm>
+          <a:prstGeom prst="rect">
+            <a:avLst/>
+          </a:prstGeom>
+          <a:noFill/>
+          <a:ln/>
+        </p:spPr>
+        <p:txBody>
+          <a:bodyPr wrap="square" lIns="0" tIns="0" rIns="0" bIns="0" rtlCol="0" anchor="ctr"/>
+          <a:lstStyle/>
+          <a:p>
+            <a:pPr marL="0" indent="0" algn="ctr">
+              <a:buNone/>
+            </a:pPr>
+            <a:r>
+              <a:rPr lang="en-US" sz="800" b="1" dirty="0">
+                <a:solidFill>
+                  <a:srgbClr val="7C3AED"/>
+                </a:solidFill>
+                <a:latin typeface="Calibri" pitchFamily="34" charset="0"/>
+                <a:ea typeface="Calibri" pitchFamily="34" charset="-122"/>
+                <a:cs typeface="Calibri" pitchFamily="34" charset="-120"/>
+              </a:rPr>
+              <a:t>Data Governance</a:t>
+            </a:r>
+            <a:endParaRPr lang="en-US" sz="800" dirty="0"/>
+          </a:p>
+        </p:txBody>
+      </p:sp>
+      <p:sp>
+        <p:nvSpPr>
+          <p:cNvPr id="26" name="Text 24"/>
+          <p:cNvSpPr/>
+          <p:nvPr/>
+        </p:nvSpPr>
+        <p:spPr>
+          <a:xfrm>
+            <a:off x="2487168" y="2487168"/>
+            <a:ext cx="1828800" cy="256032"/>
+          </a:xfrm>
+          <a:prstGeom prst="rect">
+            <a:avLst/>
+          </a:prstGeom>
+          <a:noFill/>
+          <a:ln/>
+        </p:spPr>
+        <p:txBody>
+          <a:bodyPr wrap="square" lIns="0" tIns="0" rIns="0" bIns="0" rtlCol="0" anchor="ctr"/>
+          <a:lstStyle/>
+          <a:p>
+            <a:pPr marL="0" indent="0">
+              <a:buNone/>
+            </a:pPr>
+            <a:r>
+              <a:rPr lang="en-US" sz="1200" b="1" dirty="0">
+                <a:solidFill>
+                  <a:srgbClr val="0D1B2A"/>
+                </a:solidFill>
+                <a:latin typeface="Calibri" pitchFamily="34" charset="0"/>
+                <a:ea typeface="Calibri" pitchFamily="34" charset="-122"/>
+                <a:cs typeface="Calibri" pitchFamily="34" charset="-120"/>
+              </a:rPr>
+              <a:t>Audit Logging</a:t>
+            </a:r>
+            <a:endParaRPr lang="en-US" sz="1200" dirty="0"/>
+          </a:p>
+        </p:txBody>
+      </p:sp>
+      <p:sp>
+        <p:nvSpPr>
+          <p:cNvPr id="27" name="Text 25"/>
+          <p:cNvSpPr/>
+          <p:nvPr/>
+        </p:nvSpPr>
+        <p:spPr>
+          <a:xfrm>
+            <a:off x="1115568" y="2779776"/>
+            <a:ext cx="3200400" cy="365760"/>
+          </a:xfrm>
+          <a:prstGeom prst="rect">
+            <a:avLst/>
+          </a:prstGeom>
+          <a:noFill/>
+          <a:ln/>
+        </p:spPr>
+        <p:txBody>
+          <a:bodyPr wrap="square" lIns="0" tIns="0" rIns="0" bIns="0" rtlCol="0" anchor="ctr"/>
+          <a:lstStyle/>
+          <a:p>
+            <a:pPr marL="0" indent="0">
+              <a:buNone/>
+            </a:pPr>
+            <a:r>
+              <a:rPr lang="en-US" sz="900" dirty="0">
+                <a:solidFill>
+                  <a:srgbClr val="334155"/>
+                </a:solidFill>
+                <a:latin typeface="Calibri" pitchFamily="34" charset="0"/>
+                <a:ea typeface="Calibri" pitchFamily="34" charset="-122"/>
+                <a:cs typeface="Calibri" pitchFamily="34" charset="-120"/>
+              </a:rPr>
+              <a:t>Record who accessed which file and when. Required for full data governance and compliance.</a:t>
+            </a:r>
+            <a:endParaRPr lang="en-US" sz="900" dirty="0"/>
+          </a:p>
+        </p:txBody>
+      </p:sp>
+      <p:sp>
+        <p:nvSpPr>
+          <p:cNvPr id="28" name="Text 26"/>
+          <p:cNvSpPr/>
+          <p:nvPr/>
+        </p:nvSpPr>
+        <p:spPr>
+          <a:xfrm>
+            <a:off x="1115568" y="3182112"/>
+            <a:ext cx="3200400" cy="201168"/>
+          </a:xfrm>
+          <a:prstGeom prst="rect">
+            <a:avLst/>
+          </a:prstGeom>
+          <a:noFill/>
+          <a:ln/>
+        </p:spPr>
+        <p:txBody>
+          <a:bodyPr wrap="square" lIns="0" tIns="0" rIns="0" bIns="0" rtlCol="0" anchor="ctr"/>
+          <a:lstStyle/>
+          <a:p>
+            <a:pPr marL="0" indent="0">
+              <a:buNone/>
+            </a:pPr>
+            <a:r>
+              <a:rPr lang="en-US" sz="800" dirty="0">
+                <a:solidFill>
+                  <a:srgbClr val="7C3AED"/>
+                </a:solidFill>
+                <a:latin typeface="Courier New" pitchFamily="34" charset="0"/>
+                <a:ea typeface="Courier New" pitchFamily="34" charset="-122"/>
+                <a:cs typeface="Courier New" pitchFamily="34" charset="-120"/>
+              </a:rPr>
+              <a:t>→  MinIO audit log → separate logging container</a:t>
+            </a:r>
+            <a:endParaRPr lang="en-US" sz="800" dirty="0"/>
+          </a:p>
+        </p:txBody>
+      </p:sp>
+      <p:sp>
+        <p:nvSpPr>
+          <p:cNvPr id="29" name="Shape 27"/>
+          <p:cNvSpPr/>
+          <p:nvPr/>
+        </p:nvSpPr>
+        <p:spPr>
+          <a:xfrm>
+            <a:off x="4617720" y="2432304"/>
+            <a:ext cx="3977640" cy="1042416"/>
+          </a:xfrm>
+          <a:prstGeom prst="roundRect">
+            <a:avLst>
+              <a:gd name="adj" fmla="val 8772"/>
+            </a:avLst>
+          </a:prstGeom>
+          <a:solidFill>
+            <a:srgbClr val="FFFFFF"/>
+          </a:solidFill>
+          <a:ln w="6350">
+            <a:solidFill>
+              <a:srgbClr val="E2E8F0"/>
+            </a:solidFill>
+            <a:prstDash val="solid"/>
+          </a:ln>
+          <a:effectLst>
+            <a:outerShdw blurRad="76200" dist="12700" dir="2700000" algn="bl" rotWithShape="0">
+              <a:srgbClr val="000000">
+                <a:alpha val="8000"/>
+              </a:srgbClr>
+            </a:outerShdw>
+          </a:effectLst>
+        </p:spPr>
+        <p:txBody>
+          <a:bodyPr/>
+          <a:lstStyle/>
+          <a:p>
+            <a:endParaRPr lang="en-US"/>
+          </a:p>
+        </p:txBody>
+      </p:sp>
+      <p:sp>
+        <p:nvSpPr>
+          <p:cNvPr id="30" name="Shape 28"/>
+          <p:cNvSpPr/>
+          <p:nvPr/>
+        </p:nvSpPr>
+        <p:spPr>
+          <a:xfrm>
+            <a:off x="4617720" y="2542032"/>
+            <a:ext cx="54864" cy="822960"/>
+          </a:xfrm>
+          <a:prstGeom prst="rect">
+            <a:avLst/>
+          </a:prstGeom>
+          <a:solidFill>
+            <a:srgbClr val="7C3AED"/>
+          </a:solidFill>
+          <a:ln w="12700">
+            <a:solidFill>
+              <a:srgbClr val="7C3AED"/>
+            </a:solidFill>
+            <a:prstDash val="solid"/>
+          </a:ln>
+        </p:spPr>
+        <p:txBody>
+          <a:bodyPr/>
+          <a:lstStyle/>
+          <a:p>
+            <a:endParaRPr lang="en-US"/>
+          </a:p>
+        </p:txBody>
+      </p:sp>
+      <p:sp>
+        <p:nvSpPr>
+          <p:cNvPr id="31" name="Text 29"/>
+          <p:cNvSpPr/>
+          <p:nvPr/>
+        </p:nvSpPr>
+        <p:spPr>
+          <a:xfrm>
+            <a:off x="4745736" y="2523744"/>
+            <a:ext cx="457200" cy="457200"/>
+          </a:xfrm>
+          <a:prstGeom prst="rect">
+            <a:avLst/>
+          </a:prstGeom>
+          <a:noFill/>
+          <a:ln/>
+        </p:spPr>
+        <p:txBody>
+          <a:bodyPr wrap="square" lIns="0" tIns="0" rIns="0" bIns="0" rtlCol="0" anchor="ctr"/>
+          <a:lstStyle/>
+          <a:p>
+            <a:pPr marL="0" indent="0" algn="ctr">
+              <a:buNone/>
+            </a:pPr>
+            <a:r>
+              <a:rPr lang="en-US" sz="2000" dirty="0">
+                <a:solidFill>
+                  <a:srgbClr val="000000"/>
+                </a:solidFill>
+              </a:rPr>
+              <a:t>⏱️</a:t>
+            </a:r>
+            <a:endParaRPr lang="en-US" sz="2000" dirty="0"/>
+          </a:p>
+        </p:txBody>
+      </p:sp>
+      <p:sp>
+        <p:nvSpPr>
+          <p:cNvPr id="32" name="Shape 30"/>
+          <p:cNvSpPr/>
+          <p:nvPr/>
+        </p:nvSpPr>
+        <p:spPr>
+          <a:xfrm>
+            <a:off x="5276088" y="2505456"/>
+            <a:ext cx="1280160" cy="219456"/>
+          </a:xfrm>
+          <a:prstGeom prst="roundRect">
+            <a:avLst>
+              <a:gd name="adj" fmla="val 16667"/>
+            </a:avLst>
+          </a:prstGeom>
+          <a:solidFill>
+            <a:srgbClr val="F5F3FF"/>
+          </a:solidFill>
+          <a:ln w="6350">
+            <a:solidFill>
+              <a:srgbClr val="7C3AED"/>
+            </a:solidFill>
+            <a:prstDash val="solid"/>
+          </a:ln>
+        </p:spPr>
+        <p:txBody>
+          <a:bodyPr/>
+          <a:lstStyle/>
+          <a:p>
+            <a:endParaRPr lang="en-US"/>
+          </a:p>
+        </p:txBody>
+      </p:sp>
+      <p:sp>
+        <p:nvSpPr>
+          <p:cNvPr id="33" name="Text 31"/>
+          <p:cNvSpPr/>
+          <p:nvPr/>
+        </p:nvSpPr>
+        <p:spPr>
+          <a:xfrm>
+            <a:off x="5276088" y="2505456"/>
+            <a:ext cx="1280160" cy="219456"/>
+          </a:xfrm>
+          <a:prstGeom prst="rect">
+            <a:avLst/>
+          </a:prstGeom>
+          <a:noFill/>
+          <a:ln/>
+        </p:spPr>
+        <p:txBody>
+          <a:bodyPr wrap="square" lIns="0" tIns="0" rIns="0" bIns="0" rtlCol="0" anchor="ctr"/>
+          <a:lstStyle/>
+          <a:p>
+            <a:pPr marL="0" indent="0" algn="ctr">
+              <a:buNone/>
+            </a:pPr>
+            <a:r>
+              <a:rPr lang="en-US" sz="800" b="1" dirty="0">
+                <a:solidFill>
+                  <a:srgbClr val="7C3AED"/>
+                </a:solidFill>
+                <a:latin typeface="Calibri" pitchFamily="34" charset="0"/>
+                <a:ea typeface="Calibri" pitchFamily="34" charset="-122"/>
+                <a:cs typeface="Calibri" pitchFamily="34" charset="-120"/>
+              </a:rPr>
+              <a:t>Data Governance</a:t>
+            </a:r>
+            <a:endParaRPr lang="en-US" sz="800" dirty="0"/>
+          </a:p>
+        </p:txBody>
+      </p:sp>
+      <p:sp>
+        <p:nvSpPr>
+          <p:cNvPr id="34" name="Text 32"/>
+          <p:cNvSpPr/>
+          <p:nvPr/>
+        </p:nvSpPr>
+        <p:spPr>
+          <a:xfrm>
+            <a:off x="6647688" y="2487168"/>
+            <a:ext cx="1828800" cy="256032"/>
+          </a:xfrm>
+          <a:prstGeom prst="rect">
+            <a:avLst/>
+          </a:prstGeom>
+          <a:noFill/>
+          <a:ln/>
+        </p:spPr>
+        <p:txBody>
+          <a:bodyPr wrap="square" lIns="0" tIns="0" rIns="0" bIns="0" rtlCol="0" anchor="ctr"/>
+          <a:lstStyle/>
+          <a:p>
+            <a:pPr marL="0" indent="0">
+              <a:buNone/>
+            </a:pPr>
+            <a:r>
+              <a:rPr lang="en-US" sz="1200" b="1" dirty="0">
+                <a:solidFill>
+                  <a:srgbClr val="0D1B2A"/>
+                </a:solidFill>
+                <a:latin typeface="Calibri" pitchFamily="34" charset="0"/>
+                <a:ea typeface="Calibri" pitchFamily="34" charset="-122"/>
+                <a:cs typeface="Calibri" pitchFamily="34" charset="-120"/>
+              </a:rPr>
+              <a:t>Data Lifecycle Policies</a:t>
+            </a:r>
+            <a:endParaRPr lang="en-US" sz="1200" dirty="0"/>
+          </a:p>
+        </p:txBody>
+      </p:sp>
+      <p:sp>
+        <p:nvSpPr>
+          <p:cNvPr id="35" name="Text 33"/>
+          <p:cNvSpPr/>
+          <p:nvPr/>
+        </p:nvSpPr>
+        <p:spPr>
+          <a:xfrm>
+            <a:off x="5276088" y="2779776"/>
+            <a:ext cx="3200400" cy="365760"/>
+          </a:xfrm>
+          <a:prstGeom prst="rect">
+            <a:avLst/>
+          </a:prstGeom>
+          <a:noFill/>
+          <a:ln/>
+        </p:spPr>
+        <p:txBody>
+          <a:bodyPr wrap="square" lIns="0" tIns="0" rIns="0" bIns="0" rtlCol="0" anchor="ctr"/>
+          <a:lstStyle/>
+          <a:p>
+            <a:pPr marL="0" indent="0">
+              <a:buNone/>
+            </a:pPr>
+            <a:r>
+              <a:rPr lang="en-US" sz="900" dirty="0">
+                <a:solidFill>
+                  <a:srgbClr val="334155"/>
+                </a:solidFill>
+                <a:latin typeface="Calibri" pitchFamily="34" charset="0"/>
+                <a:ea typeface="Calibri" pitchFamily="34" charset="-122"/>
+                <a:cs typeface="Calibri" pitchFamily="34" charset="-120"/>
+              </a:rPr>
+              <a:t>Auto-expire files after N days. Prevents unbounded storage growth and enforces retention rules.</a:t>
+            </a:r>
+            <a:endParaRPr lang="en-US" sz="900" dirty="0"/>
+          </a:p>
+        </p:txBody>
+      </p:sp>
+      <p:sp>
+        <p:nvSpPr>
+          <p:cNvPr id="36" name="Text 34"/>
+          <p:cNvSpPr/>
+          <p:nvPr/>
+        </p:nvSpPr>
+        <p:spPr>
+          <a:xfrm>
+            <a:off x="5276088" y="3182112"/>
+            <a:ext cx="3200400" cy="201168"/>
+          </a:xfrm>
+          <a:prstGeom prst="rect">
+            <a:avLst/>
+          </a:prstGeom>
+          <a:noFill/>
+          <a:ln/>
+        </p:spPr>
+        <p:txBody>
+          <a:bodyPr wrap="square" lIns="0" tIns="0" rIns="0" bIns="0" rtlCol="0" anchor="ctr"/>
+          <a:lstStyle/>
+          <a:p>
+            <a:pPr marL="0" indent="0">
+              <a:buNone/>
+            </a:pPr>
+            <a:r>
+              <a:rPr lang="en-US" sz="800" dirty="0">
+                <a:solidFill>
+                  <a:srgbClr val="7C3AED"/>
+                </a:solidFill>
+                <a:latin typeface="Courier New" pitchFamily="34" charset="0"/>
+                <a:ea typeface="Courier New" pitchFamily="34" charset="-122"/>
+                <a:cs typeface="Courier New" pitchFamily="34" charset="-120"/>
+              </a:rPr>
+              <a:t>→  mc ilm rule add local/uploads --expiry-days 30</a:t>
+            </a:r>
+            <a:endParaRPr lang="en-US" sz="800" dirty="0"/>
+          </a:p>
+        </p:txBody>
+      </p:sp>
+      <p:sp>
+        <p:nvSpPr>
+          <p:cNvPr id="37" name="Shape 35"/>
+          <p:cNvSpPr/>
+          <p:nvPr/>
+        </p:nvSpPr>
+        <p:spPr>
+          <a:xfrm>
+            <a:off x="457200" y="3602736"/>
+            <a:ext cx="3977640" cy="1042416"/>
+          </a:xfrm>
+          <a:prstGeom prst="roundRect">
+            <a:avLst>
+              <a:gd name="adj" fmla="val 8772"/>
+            </a:avLst>
+          </a:prstGeom>
+          <a:solidFill>
+            <a:srgbClr val="FFFFFF"/>
+          </a:solidFill>
+          <a:ln w="6350">
+            <a:solidFill>
+              <a:srgbClr val="E2E8F0"/>
+            </a:solidFill>
+            <a:prstDash val="solid"/>
+          </a:ln>
+          <a:effectLst>
+            <a:outerShdw blurRad="76200" dist="12700" dir="2700000" algn="bl" rotWithShape="0">
+              <a:srgbClr val="000000">
+                <a:alpha val="8000"/>
+              </a:srgbClr>
+            </a:outerShdw>
+          </a:effectLst>
+        </p:spPr>
+        <p:txBody>
+          <a:bodyPr/>
+          <a:lstStyle/>
+          <a:p>
+            <a:endParaRPr lang="en-US"/>
+          </a:p>
+        </p:txBody>
+      </p:sp>
+      <p:sp>
+        <p:nvSpPr>
+          <p:cNvPr id="38" name="Shape 36"/>
+          <p:cNvSpPr/>
+          <p:nvPr/>
+        </p:nvSpPr>
+        <p:spPr>
+          <a:xfrm>
+            <a:off x="457200" y="3712464"/>
+            <a:ext cx="54864" cy="822960"/>
+          </a:xfrm>
+          <a:prstGeom prst="rect">
+            <a:avLst/>
+          </a:prstGeom>
+          <a:solidFill>
+            <a:srgbClr val="16A34A"/>
+          </a:solidFill>
+          <a:ln w="12700">
+            <a:solidFill>
+              <a:srgbClr val="16A34A"/>
+            </a:solidFill>
+            <a:prstDash val="solid"/>
+          </a:ln>
+        </p:spPr>
+        <p:txBody>
+          <a:bodyPr/>
+          <a:lstStyle/>
+          <a:p>
+            <a:endParaRPr lang="en-US"/>
+          </a:p>
+        </p:txBody>
+      </p:sp>
+      <p:sp>
+        <p:nvSpPr>
+          <p:cNvPr id="39" name="Text 37"/>
+          <p:cNvSpPr/>
+          <p:nvPr/>
+        </p:nvSpPr>
+        <p:spPr>
+          <a:xfrm>
+            <a:off x="585216" y="3694176"/>
+            <a:ext cx="457200" cy="457200"/>
+          </a:xfrm>
+          <a:prstGeom prst="rect">
+            <a:avLst/>
+          </a:prstGeom>
+          <a:noFill/>
+          <a:ln/>
+        </p:spPr>
+        <p:txBody>
+          <a:bodyPr wrap="square" lIns="0" tIns="0" rIns="0" bIns="0" rtlCol="0" anchor="ctr"/>
+          <a:lstStyle/>
+          <a:p>
+            <a:pPr marL="0" indent="0" algn="ctr">
+              <a:buNone/>
+            </a:pPr>
+            <a:r>
+              <a:rPr lang="en-US" sz="2000" dirty="0">
+                <a:solidFill>
+                  <a:srgbClr val="000000"/>
+                </a:solidFill>
+              </a:rPr>
+              <a:t>☸️</a:t>
+            </a:r>
+            <a:endParaRPr lang="en-US" sz="2000" dirty="0"/>
+          </a:p>
+        </p:txBody>
+      </p:sp>
+      <p:sp>
+        <p:nvSpPr>
+          <p:cNvPr id="40" name="Shape 38"/>
+          <p:cNvSpPr/>
+          <p:nvPr/>
+        </p:nvSpPr>
+        <p:spPr>
+          <a:xfrm>
+            <a:off x="1115568" y="3675888"/>
+            <a:ext cx="1280160" cy="219456"/>
+          </a:xfrm>
+          <a:prstGeom prst="roundRect">
+            <a:avLst>
+              <a:gd name="adj" fmla="val 16667"/>
+            </a:avLst>
+          </a:prstGeom>
+          <a:solidFill>
+            <a:srgbClr val="DCFCE7"/>
+          </a:solidFill>
+          <a:ln w="6350">
+            <a:solidFill>
+              <a:srgbClr val="16A34A"/>
+            </a:solidFill>
+            <a:prstDash val="solid"/>
+          </a:ln>
+        </p:spPr>
+        <p:txBody>
+          <a:bodyPr/>
+          <a:lstStyle/>
+          <a:p>
+            <a:endParaRPr lang="en-US"/>
+          </a:p>
+        </p:txBody>
+      </p:sp>
+      <p:sp>
+        <p:nvSpPr>
+          <p:cNvPr id="41" name="Text 39"/>
+          <p:cNvSpPr/>
+          <p:nvPr/>
+        </p:nvSpPr>
+        <p:spPr>
+          <a:xfrm>
+            <a:off x="1115568" y="3675888"/>
+            <a:ext cx="1280160" cy="219456"/>
+          </a:xfrm>
+          <a:prstGeom prst="rect">
+            <a:avLst/>
+          </a:prstGeom>
+          <a:noFill/>
+          <a:ln/>
+        </p:spPr>
+        <p:txBody>
+          <a:bodyPr wrap="square" lIns="0" tIns="0" rIns="0" bIns="0" rtlCol="0" anchor="ctr"/>
+          <a:lstStyle/>
+          <a:p>
+            <a:pPr marL="0" indent="0" algn="ctr">
+              <a:buNone/>
+            </a:pPr>
+            <a:r>
+              <a:rPr lang="en-US" sz="800" b="1" dirty="0">
+                <a:solidFill>
+                  <a:srgbClr val="16A34A"/>
+                </a:solidFill>
+                <a:latin typeface="Calibri" pitchFamily="34" charset="0"/>
+                <a:ea typeface="Calibri" pitchFamily="34" charset="-122"/>
+                <a:cs typeface="Calibri" pitchFamily="34" charset="-120"/>
+              </a:rPr>
+              <a:t>Scalability</a:t>
+            </a:r>
+            <a:endParaRPr lang="en-US" sz="800" dirty="0"/>
+          </a:p>
+        </p:txBody>
+      </p:sp>
+      <p:sp>
+        <p:nvSpPr>
+          <p:cNvPr id="42" name="Text 40"/>
+          <p:cNvSpPr/>
+          <p:nvPr/>
+        </p:nvSpPr>
+        <p:spPr>
+          <a:xfrm>
+            <a:off x="2487168" y="3657600"/>
+            <a:ext cx="1828800" cy="256032"/>
+          </a:xfrm>
+          <a:prstGeom prst="rect">
+            <a:avLst/>
+          </a:prstGeom>
+          <a:noFill/>
+          <a:ln/>
+        </p:spPr>
+        <p:txBody>
+          <a:bodyPr wrap="square" lIns="0" tIns="0" rIns="0" bIns="0" rtlCol="0" anchor="ctr"/>
+          <a:lstStyle/>
+          <a:p>
+            <a:pPr marL="0" indent="0">
+              <a:buNone/>
+            </a:pPr>
+            <a:r>
+              <a:rPr lang="en-US" sz="1200" b="1" dirty="0">
+                <a:solidFill>
+                  <a:srgbClr val="0D1B2A"/>
+                </a:solidFill>
+                <a:latin typeface="Calibri" pitchFamily="34" charset="0"/>
+                <a:ea typeface="Calibri" pitchFamily="34" charset="-122"/>
+                <a:cs typeface="Calibri" pitchFamily="34" charset="-120"/>
+              </a:rPr>
+              <a:t>Kubernetes Deployment</a:t>
+            </a:r>
+            <a:endParaRPr lang="en-US" sz="1200" dirty="0"/>
+          </a:p>
+        </p:txBody>
+      </p:sp>
+      <p:sp>
+        <p:nvSpPr>
+          <p:cNvPr id="43" name="Text 41"/>
+          <p:cNvSpPr/>
+          <p:nvPr/>
+        </p:nvSpPr>
+        <p:spPr>
+          <a:xfrm>
+            <a:off x="1115568" y="3950208"/>
+            <a:ext cx="3200400" cy="365760"/>
+          </a:xfrm>
+          <a:prstGeom prst="rect">
+            <a:avLst/>
+          </a:prstGeom>
+          <a:noFill/>
+          <a:ln/>
+        </p:spPr>
+        <p:txBody>
+          <a:bodyPr wrap="square" lIns="0" tIns="0" rIns="0" bIns="0" rtlCol="0" anchor="ctr"/>
+          <a:lstStyle/>
+          <a:p>
+            <a:pPr marL="0" indent="0">
+              <a:buNone/>
+            </a:pPr>
+            <a:r>
+              <a:rPr lang="en-US" sz="900" dirty="0">
+                <a:solidFill>
+                  <a:srgbClr val="334155"/>
+                </a:solidFill>
+                <a:latin typeface="Calibri" pitchFamily="34" charset="0"/>
+                <a:ea typeface="Calibri" pitchFamily="34" charset="-122"/>
+                <a:cs typeface="Calibri" pitchFamily="34" charset="-120"/>
+              </a:rPr>
+              <a:t>Replace Docker Compose with Kubernetes for automatic container scheduling, rolling updates, and self-healing at scale.</a:t>
+            </a:r>
+            <a:endParaRPr lang="en-US" sz="900" dirty="0"/>
+          </a:p>
+        </p:txBody>
+      </p:sp>
+      <p:sp>
+        <p:nvSpPr>
+          <p:cNvPr id="44" name="Text 42"/>
+          <p:cNvSpPr/>
+          <p:nvPr/>
+        </p:nvSpPr>
+        <p:spPr>
+          <a:xfrm>
+            <a:off x="1115568" y="4352544"/>
+            <a:ext cx="3200400" cy="201168"/>
+          </a:xfrm>
+          <a:prstGeom prst="rect">
+            <a:avLst/>
+          </a:prstGeom>
+          <a:noFill/>
+          <a:ln/>
+        </p:spPr>
+        <p:txBody>
+          <a:bodyPr wrap="square" lIns="0" tIns="0" rIns="0" bIns="0" rtlCol="0" anchor="ctr"/>
+          <a:lstStyle/>
+          <a:p>
+            <a:pPr marL="0" indent="0">
+              <a:buNone/>
+            </a:pPr>
+            <a:r>
+              <a:rPr lang="en-US" sz="800" dirty="0">
+                <a:solidFill>
+                  <a:srgbClr val="16A34A"/>
+                </a:solidFill>
+                <a:latin typeface="Courier New" pitchFamily="34" charset="0"/>
+                <a:ea typeface="Courier New" pitchFamily="34" charset="-122"/>
+                <a:cs typeface="Courier New" pitchFamily="34" charset="-120"/>
+              </a:rPr>
+              <a:t>→  Deployments + StatefulSets + PersistentVolumes</a:t>
+            </a:r>
+            <a:endParaRPr lang="en-US" sz="800" dirty="0"/>
+          </a:p>
+        </p:txBody>
+      </p:sp>
+      <p:sp>
+        <p:nvSpPr>
+          <p:cNvPr id="45" name="Shape 43"/>
+          <p:cNvSpPr/>
+          <p:nvPr/>
+        </p:nvSpPr>
+        <p:spPr>
+          <a:xfrm>
+            <a:off x="4617720" y="3602736"/>
+            <a:ext cx="3977640" cy="1042416"/>
+          </a:xfrm>
+          <a:prstGeom prst="roundRect">
+            <a:avLst>
+              <a:gd name="adj" fmla="val 8772"/>
+            </a:avLst>
+          </a:prstGeom>
+          <a:solidFill>
+            <a:srgbClr val="FFFFFF"/>
+          </a:solidFill>
+          <a:ln w="6350">
+            <a:solidFill>
+              <a:srgbClr val="E2E8F0"/>
+            </a:solidFill>
+            <a:prstDash val="solid"/>
+          </a:ln>
+          <a:effectLst>
+            <a:outerShdw blurRad="76200" dist="12700" dir="2700000" algn="bl" rotWithShape="0">
+              <a:srgbClr val="000000">
+                <a:alpha val="8000"/>
+              </a:srgbClr>
+            </a:outerShdw>
+          </a:effectLst>
+        </p:spPr>
+        <p:txBody>
+          <a:bodyPr/>
+          <a:lstStyle/>
+          <a:p>
+            <a:endParaRPr lang="en-US"/>
+          </a:p>
+        </p:txBody>
+      </p:sp>
+      <p:sp>
+        <p:nvSpPr>
+          <p:cNvPr id="46" name="Shape 44"/>
+          <p:cNvSpPr/>
+          <p:nvPr/>
+        </p:nvSpPr>
+        <p:spPr>
+          <a:xfrm>
+            <a:off x="4617720" y="3712464"/>
+            <a:ext cx="54864" cy="822960"/>
+          </a:xfrm>
+          <a:prstGeom prst="rect">
+            <a:avLst/>
+          </a:prstGeom>
+          <a:solidFill>
+            <a:srgbClr val="F97316"/>
+          </a:solidFill>
+          <a:ln w="12700">
+            <a:solidFill>
+              <a:srgbClr val="F97316"/>
+            </a:solidFill>
+            <a:prstDash val="solid"/>
+          </a:ln>
+        </p:spPr>
+        <p:txBody>
+          <a:bodyPr/>
+          <a:lstStyle/>
+          <a:p>
+            <a:endParaRPr lang="en-US"/>
+          </a:p>
+        </p:txBody>
+      </p:sp>
+      <p:sp>
+        <p:nvSpPr>
+          <p:cNvPr id="47" name="Text 45"/>
+          <p:cNvSpPr/>
+          <p:nvPr/>
+        </p:nvSpPr>
+        <p:spPr>
+          <a:xfrm>
+            <a:off x="4745736" y="3694176"/>
+            <a:ext cx="457200" cy="457200"/>
+          </a:xfrm>
+          <a:prstGeom prst="rect">
+            <a:avLst/>
+          </a:prstGeom>
+          <a:noFill/>
+          <a:ln/>
+        </p:spPr>
+        <p:txBody>
+          <a:bodyPr wrap="square" lIns="0" tIns="0" rIns="0" bIns="0" rtlCol="0" anchor="ctr"/>
+          <a:lstStyle/>
+          <a:p>
+            <a:pPr marL="0" indent="0" algn="ctr">
+              <a:buNone/>
+            </a:pPr>
+            <a:r>
+              <a:rPr lang="en-US" sz="2000" dirty="0">
+                <a:solidFill>
+                  <a:srgbClr val="000000"/>
+                </a:solidFill>
+              </a:rPr>
+              <a:t>🛡️</a:t>
+            </a:r>
+            <a:endParaRPr lang="en-US" sz="2000" dirty="0"/>
+          </a:p>
+        </p:txBody>
+      </p:sp>
+      <p:sp>
+        <p:nvSpPr>
+          <p:cNvPr id="48" name="Shape 46"/>
+          <p:cNvSpPr/>
+          <p:nvPr/>
+        </p:nvSpPr>
+        <p:spPr>
+          <a:xfrm>
+            <a:off x="5276088" y="3675888"/>
+            <a:ext cx="1280160" cy="219456"/>
+          </a:xfrm>
+          <a:prstGeom prst="roundRect">
+            <a:avLst>
+              <a:gd name="adj" fmla="val 16667"/>
+            </a:avLst>
+          </a:prstGeom>
+          <a:solidFill>
+            <a:srgbClr val="FFF7ED"/>
+          </a:solidFill>
+          <a:ln w="6350">
+            <a:solidFill>
+              <a:srgbClr val="F97316"/>
+            </a:solidFill>
+            <a:prstDash val="solid"/>
+          </a:ln>
+        </p:spPr>
+        <p:txBody>
+          <a:bodyPr/>
+          <a:lstStyle/>
+          <a:p>
+            <a:endParaRPr lang="en-US"/>
+          </a:p>
+        </p:txBody>
+      </p:sp>
+      <p:sp>
+        <p:nvSpPr>
+          <p:cNvPr id="49" name="Text 47"/>
+          <p:cNvSpPr/>
+          <p:nvPr/>
+        </p:nvSpPr>
+        <p:spPr>
+          <a:xfrm>
+            <a:off x="5276088" y="3675888"/>
+            <a:ext cx="1280160" cy="219456"/>
+          </a:xfrm>
+          <a:prstGeom prst="rect">
+            <a:avLst/>
+          </a:prstGeom>
+          <a:noFill/>
+          <a:ln/>
+        </p:spPr>
+        <p:txBody>
+          <a:bodyPr wrap="square" lIns="0" tIns="0" rIns="0" bIns="0" rtlCol="0" anchor="ctr"/>
+          <a:lstStyle/>
+          <a:p>
+            <a:pPr marL="0" indent="0" algn="ctr">
+              <a:buNone/>
+            </a:pPr>
+            <a:r>
+              <a:rPr lang="en-US" sz="800" b="1" dirty="0">
+                <a:solidFill>
+                  <a:srgbClr val="F97316"/>
+                </a:solidFill>
+                <a:latin typeface="Calibri" pitchFamily="34" charset="0"/>
+                <a:ea typeface="Calibri" pitchFamily="34" charset="-122"/>
+                <a:cs typeface="Calibri" pitchFamily="34" charset="-120"/>
+              </a:rPr>
+              <a:t>Fault Tolerance</a:t>
+            </a:r>
+            <a:endParaRPr lang="en-US" sz="800" dirty="0"/>
+          </a:p>
+        </p:txBody>
+      </p:sp>
+      <p:sp>
+        <p:nvSpPr>
+          <p:cNvPr id="50" name="Text 48"/>
+          <p:cNvSpPr/>
+          <p:nvPr/>
+        </p:nvSpPr>
+        <p:spPr>
+          <a:xfrm>
+            <a:off x="6647688" y="3657600"/>
+            <a:ext cx="1828800" cy="256032"/>
+          </a:xfrm>
+          <a:prstGeom prst="rect">
+            <a:avLst/>
+          </a:prstGeom>
+          <a:noFill/>
+          <a:ln/>
+        </p:spPr>
+        <p:txBody>
+          <a:bodyPr wrap="square" lIns="0" tIns="0" rIns="0" bIns="0" rtlCol="0" anchor="ctr"/>
+          <a:lstStyle/>
+          <a:p>
+            <a:pPr marL="0" indent="0">
+              <a:buNone/>
+            </a:pPr>
+            <a:r>
+              <a:rPr lang="en-US" sz="1200" b="1" dirty="0">
+                <a:solidFill>
+                  <a:srgbClr val="0D1B2A"/>
+                </a:solidFill>
+                <a:latin typeface="Calibri" pitchFamily="34" charset="0"/>
+                <a:ea typeface="Calibri" pitchFamily="34" charset="-122"/>
+                <a:cs typeface="Calibri" pitchFamily="34" charset="-120"/>
+              </a:rPr>
+              <a:t>Byzantine Fault Tolerance</a:t>
+            </a:r>
+            <a:endParaRPr lang="en-US" sz="1200" dirty="0"/>
+          </a:p>
+        </p:txBody>
+      </p:sp>
+      <p:sp>
+        <p:nvSpPr>
+          <p:cNvPr id="51" name="Text 49"/>
+          <p:cNvSpPr/>
+          <p:nvPr/>
+        </p:nvSpPr>
+        <p:spPr>
+          <a:xfrm>
+            <a:off x="5276088" y="3950208"/>
+            <a:ext cx="3200400" cy="365760"/>
+          </a:xfrm>
+          <a:prstGeom prst="rect">
+            <a:avLst/>
+          </a:prstGeom>
+          <a:noFill/>
+          <a:ln/>
+        </p:spPr>
+        <p:txBody>
+          <a:bodyPr wrap="square" lIns="0" tIns="0" rIns="0" bIns="0" rtlCol="0" anchor="ctr"/>
+          <a:lstStyle/>
+          <a:p>
+            <a:pPr marL="0" indent="0">
+              <a:buNone/>
+            </a:pPr>
+            <a:r>
+              <a:rPr lang="en-US" sz="900" dirty="0">
+                <a:solidFill>
+                  <a:srgbClr val="334155"/>
+                </a:solidFill>
+                <a:latin typeface="Calibri" pitchFamily="34" charset="0"/>
+                <a:ea typeface="Calibri" pitchFamily="34" charset="-122"/>
+                <a:cs typeface="Calibri" pitchFamily="34" charset="-120"/>
+              </a:rPr>
+              <a:t>Scale to 7 nodes (EC:3) and add PBFT consensus to tolerate malicious node behaviour, not just crashes.</a:t>
+            </a:r>
+            <a:endParaRPr lang="en-US" sz="900" dirty="0"/>
+          </a:p>
+        </p:txBody>
+      </p:sp>
+      <p:sp>
+        <p:nvSpPr>
+          <p:cNvPr id="52" name="Text 50"/>
+          <p:cNvSpPr/>
+          <p:nvPr/>
+        </p:nvSpPr>
+        <p:spPr>
+          <a:xfrm>
+            <a:off x="5276088" y="4352544"/>
+            <a:ext cx="3200400" cy="201168"/>
+          </a:xfrm>
+          <a:prstGeom prst="rect">
+            <a:avLst/>
+          </a:prstGeom>
+          <a:noFill/>
+          <a:ln/>
+        </p:spPr>
+        <p:txBody>
+          <a:bodyPr wrap="square" lIns="0" tIns="0" rIns="0" bIns="0" rtlCol="0" anchor="ctr"/>
+          <a:lstStyle/>
+          <a:p>
+            <a:pPr marL="0" indent="0">
+              <a:buNone/>
+            </a:pPr>
+            <a:r>
+              <a:rPr lang="en-US" sz="800" dirty="0">
+                <a:solidFill>
+                  <a:srgbClr val="F97316"/>
+                </a:solidFill>
+                <a:latin typeface="Courier New" pitchFamily="34" charset="0"/>
+                <a:ea typeface="Courier New" pitchFamily="34" charset="-122"/>
+                <a:cs typeface="Courier New" pitchFamily="34" charset="-120"/>
+              </a:rPr>
+              <a:t>→  3f+1 nodes + PBFT protocol + SHA256 verification</a:t>
+            </a:r>
+            <a:endParaRPr lang="en-US" sz="800" dirty="0"/>
+          </a:p>
+        </p:txBody>
+      </p:sp>
+      <p:sp>
+        <p:nvSpPr>
+          <p:cNvPr id="53" name="Shape 51"/>
+          <p:cNvSpPr/>
+          <p:nvPr/>
+        </p:nvSpPr>
+        <p:spPr>
+          <a:xfrm>
+            <a:off x="457200" y="4754880"/>
+            <a:ext cx="8229600" cy="274320"/>
+          </a:xfrm>
+          <a:prstGeom prst="roundRect">
+            <a:avLst>
+              <a:gd name="adj" fmla="val 20000"/>
+            </a:avLst>
+          </a:prstGeom>
+          <a:solidFill>
+            <a:srgbClr val="F0FDFA"/>
+          </a:solidFill>
+          <a:ln w="6350">
+            <a:solidFill>
+              <a:srgbClr val="028090"/>
+            </a:solidFill>
+            <a:prstDash val="solid"/>
+          </a:ln>
+        </p:spPr>
+        <p:txBody>
+          <a:bodyPr/>
+          <a:lstStyle/>
+          <a:p>
+            <a:endParaRPr lang="en-US"/>
+          </a:p>
+        </p:txBody>
+      </p:sp>
+      <p:sp>
+        <p:nvSpPr>
+          <p:cNvPr id="54" name="Text 52"/>
+          <p:cNvSpPr/>
+          <p:nvPr/>
+        </p:nvSpPr>
+        <p:spPr>
+          <a:xfrm>
+            <a:off x="548640" y="4754880"/>
+            <a:ext cx="8046720" cy="274320"/>
+          </a:xfrm>
+          <a:prstGeom prst="rect">
+            <a:avLst/>
+          </a:prstGeom>
+          <a:noFill/>
+          <a:ln/>
+        </p:spPr>
+        <p:txBody>
+          <a:bodyPr wrap="square" lIns="0" tIns="0" rIns="0" bIns="0" rtlCol="0" anchor="ctr"/>
+          <a:lstStyle/>
+          <a:p>
+            <a:pPr marL="0" indent="0" algn="ctr">
+              <a:buNone/>
+            </a:pPr>
+            <a:r>
+              <a:rPr lang="en-US" sz="950" dirty="0">
+                <a:solidFill>
+                  <a:srgbClr val="028090"/>
+                </a:solidFill>
+                <a:latin typeface="Calibri" pitchFamily="34" charset="0"/>
+                <a:ea typeface="Calibri" pitchFamily="34" charset="-122"/>
+                <a:cs typeface="Calibri" pitchFamily="34" charset="-120"/>
+              </a:rPr>
+              <a:t>Current system is demo-ready and academically complete · These extensions would bring it to production standard</a:t>
+            </a:r>
+            <a:endParaRPr lang="en-US" sz="950" dirty="0"/>
           </a:p>
         </p:txBody>
       </p:sp>
